--- a/HCL Jigsaw/PPT_Template_Grade8_AI_TrafficFlowOptimizer.pptx
+++ b/HCL Jigsaw/PPT_Template_Grade8_AI_TrafficFlowOptimizer.pptx
@@ -2273,17 +2273,63 @@
             </a:r>
             <a:r>
               <a:rPr lang="en-GB" sz="1100" dirty="0"/>
-              <a:t>Coordinator 		              Aarav Nagar – Team Designer</a:t>
-            </a:r>
-            <a:endParaRPr lang="en-GB" sz="1100" dirty="0"/>
+              <a:t>Coordinator &amp; </a:t>
+            </a:r>
+            <a:r>
+              <a:rPr lang="en-GB" sz="1100" dirty="0">
+                <a:sym typeface="+mn-ea"/>
+              </a:rPr>
+              <a:t>Team Designer</a:t>
+            </a:r>
+            <a:endParaRPr lang="en-GB" sz="1100" dirty="0">
+              <a:sym typeface="+mn-ea"/>
+            </a:endParaRPr>
           </a:p>
           <a:p>
             <a:pPr marL="0" indent="0">
               <a:buNone/>
             </a:pPr>
             <a:r>
+              <a:rPr lang="en-GB" sz="1100" dirty="0"/>
+              <a:t> Aarav Nagar – </a:t>
+            </a:r>
+            <a:r>
+              <a:rPr lang="en-US" altLang="en-US" sz="1100" dirty="0"/>
+              <a:t>Creative Communication Strategist</a:t>
+            </a:r>
+            <a:endParaRPr lang="en-US" altLang="en-US" sz="1100" dirty="0"/>
+          </a:p>
+          <a:p>
+            <a:pPr marL="0" indent="0">
+              <a:buNone/>
+            </a:pPr>
+            <a:r>
               <a:rPr lang="en-GB" altLang="en-US" sz="1100" dirty="0"/>
-              <a:t>Ayan Ali - </a:t>
+              <a:t>Ayan Ali - D</a:t>
+            </a:r>
+            <a:r>
+              <a:rPr sz="1100">
+                <a:sym typeface="+mn-ea"/>
+              </a:rPr>
+              <a:t>ata </a:t>
+            </a:r>
+            <a:r>
+              <a:rPr lang="en-GB" sz="1100">
+                <a:sym typeface="+mn-ea"/>
+              </a:rPr>
+              <a:t>R</a:t>
+            </a:r>
+            <a:r>
+              <a:rPr sz="1100">
+                <a:sym typeface="+mn-ea"/>
+              </a:rPr>
+              <a:t>esearch</a:t>
+            </a:r>
+            <a:r>
+              <a:rPr lang="en-GB" sz="1100">
+                <a:sym typeface="+mn-ea"/>
+              </a:rPr>
+              <a:t>er</a:t>
             </a:r>
             <a:endParaRPr lang="en-GB" altLang="en-US" sz="1100" dirty="0"/>
           </a:p>
@@ -2293,7 +2339,25 @@
             </a:pPr>
             <a:r>
               <a:rPr lang="en-GB" altLang="en-US" sz="1100" dirty="0"/>
-              <a:t>Anant Yadav-</a:t>
+              <a:t>Anant Yadav-T</a:t>
+            </a:r>
+            <a:r>
+              <a:rPr sz="1100">
+                <a:sym typeface="+mn-ea"/>
+              </a:rPr>
+              <a:t>esting &amp; </a:t>
+            </a:r>
+            <a:r>
+              <a:rPr lang="en-GB" sz="1100">
+                <a:sym typeface="+mn-ea"/>
+              </a:rPr>
+              <a:t>C</a:t>
+            </a:r>
+            <a:r>
+              <a:rPr sz="1100">
+                <a:sym typeface="+mn-ea"/>
+              </a:rPr>
+              <a:t>harts</a:t>
             </a:r>
             <a:endParaRPr lang="en-GB" altLang="en-US" sz="1100" dirty="0"/>
           </a:p>
@@ -2369,17 +2433,6 @@
             <a:pPr marL="0" indent="0">
               <a:buNone/>
             </a:pPr>
-            <a:r>
-              <a:rPr lang="en-US" sz="1100" i="1" dirty="0">
-                <a:solidFill>
-                  <a:srgbClr val="9CA3AF"/>
-                </a:solidFill>
-                <a:latin typeface="Calibri" panose="020F0502020204030204" pitchFamily="34" charset="0"/>
-                <a:ea typeface="Calibri" panose="020F0502020204030204" pitchFamily="34" charset="-122"/>
-                <a:cs typeface="Calibri" panose="020F0502020204030204" pitchFamily="34" charset="-120"/>
-              </a:rPr>
-              <a:t>Type your answer here…</a:t>
-            </a:r>
             <a:endParaRPr lang="en-US" sz="1100" dirty="0"/>
           </a:p>
         </p:txBody>
